--- a/materials/OS-M3/OS-M3-S3-R-Part-II/OS-M3-S3-R-Part-II-slides.pptx
+++ b/materials/OS-M3/OS-M3-S3-R-Part-II/OS-M3-S3-R-Part-II-slides.pptx
@@ -4025,7 +4025,7 @@
             </a:pPr>
             <a:r>
               <a:rPr/>
-              <a:t>09/01/2026</a:t>
+              <a:t>11/01/2026</a:t>
             </a:r>
           </a:p>
         </p:txBody>

--- a/materials/OS-M3/OS-M3-S3-R-Part-II/OS-M3-S3-R-Part-II-slides.pptx
+++ b/materials/OS-M3/OS-M3-S3-R-Part-II/OS-M3-S3-R-Part-II-slides.pptx
@@ -4025,7 +4025,7 @@
             </a:pPr>
             <a:r>
               <a:rPr/>
-              <a:t>11/01/2026</a:t>
+              <a:t>16/01/2026</a:t>
             </a:r>
           </a:p>
         </p:txBody>

--- a/materials/OS-M3/OS-M3-S3-R-Part-II/OS-M3-S3-R-Part-II-slides.pptx
+++ b/materials/OS-M3/OS-M3-S3-R-Part-II/OS-M3-S3-R-Part-II-slides.pptx
@@ -4025,7 +4025,7 @@
             </a:pPr>
             <a:r>
               <a:rPr/>
-              <a:t>16/01/2026</a:t>
+              <a:t>18/01/2026</a:t>
             </a:r>
           </a:p>
         </p:txBody>

--- a/materials/OS-M3/OS-M3-S3-R-Part-II/OS-M3-S3-R-Part-II-slides.pptx
+++ b/materials/OS-M3/OS-M3-S3-R-Part-II/OS-M3-S3-R-Part-II-slides.pptx
@@ -4025,7 +4025,7 @@
             </a:pPr>
             <a:r>
               <a:rPr/>
-              <a:t>18/01/2026</a:t>
+              <a:t>22/01/2026</a:t>
             </a:r>
           </a:p>
         </p:txBody>

--- a/materials/OS-M3/OS-M3-S3-R-Part-II/OS-M3-S3-R-Part-II-slides.pptx
+++ b/materials/OS-M3/OS-M3-S3-R-Part-II/OS-M3-S3-R-Part-II-slides.pptx
@@ -4025,7 +4025,7 @@
             </a:pPr>
             <a:r>
               <a:rPr/>
-              <a:t>22/01/2026</a:t>
+              <a:t>23/01/2026</a:t>
             </a:r>
           </a:p>
         </p:txBody>

--- a/materials/OS-M3/OS-M3-S3-R-Part-II/OS-M3-S3-R-Part-II-slides.pptx
+++ b/materials/OS-M3/OS-M3-S3-R-Part-II/OS-M3-S3-R-Part-II-slides.pptx
@@ -4025,7 +4025,7 @@
             </a:pPr>
             <a:r>
               <a:rPr/>
-              <a:t>23/01/2026</a:t>
+              <a:t>25/01/2026</a:t>
             </a:r>
           </a:p>
         </p:txBody>

--- a/materials/OS-M3/OS-M3-S3-R-Part-II/OS-M3-S3-R-Part-II-slides.pptx
+++ b/materials/OS-M3/OS-M3-S3-R-Part-II/OS-M3-S3-R-Part-II-slides.pptx
@@ -4025,7 +4025,7 @@
             </a:pPr>
             <a:r>
               <a:rPr/>
-              <a:t>25/01/2026</a:t>
+              <a:t>28/01/2026</a:t>
             </a:r>
           </a:p>
         </p:txBody>

--- a/materials/OS-M3/OS-M3-S3-R-Part-II/OS-M3-S3-R-Part-II-slides.pptx
+++ b/materials/OS-M3/OS-M3-S3-R-Part-II/OS-M3-S3-R-Part-II-slides.pptx
@@ -4025,7 +4025,7 @@
             </a:pPr>
             <a:r>
               <a:rPr/>
-              <a:t>28/01/2026</a:t>
+              <a:t>29/01/2026</a:t>
             </a:r>
           </a:p>
         </p:txBody>

--- a/materials/OS-M3/OS-M3-S3-R-Part-II/OS-M3-S3-R-Part-II-slides.pptx
+++ b/materials/OS-M3/OS-M3-S3-R-Part-II/OS-M3-S3-R-Part-II-slides.pptx
@@ -4025,7 +4025,7 @@
             </a:pPr>
             <a:r>
               <a:rPr/>
-              <a:t>29/01/2026</a:t>
+              <a:t>01/02/2026</a:t>
             </a:r>
           </a:p>
         </p:txBody>

--- a/materials/OS-M3/OS-M3-S3-R-Part-II/OS-M3-S3-R-Part-II-slides.pptx
+++ b/materials/OS-M3/OS-M3-S3-R-Part-II/OS-M3-S3-R-Part-II-slides.pptx
@@ -4025,7 +4025,7 @@
             </a:pPr>
             <a:r>
               <a:rPr/>
-              <a:t>01/02/2026</a:t>
+              <a:t>05/02/2026</a:t>
             </a:r>
           </a:p>
         </p:txBody>

--- a/materials/OS-M3/OS-M3-S3-R-Part-II/OS-M3-S3-R-Part-II-slides.pptx
+++ b/materials/OS-M3/OS-M3-S3-R-Part-II/OS-M3-S3-R-Part-II-slides.pptx
@@ -4025,7 +4025,7 @@
             </a:pPr>
             <a:r>
               <a:rPr/>
-              <a:t>05/02/2026</a:t>
+              <a:t>08/02/2026</a:t>
             </a:r>
           </a:p>
         </p:txBody>

--- a/materials/OS-M3/OS-M3-S3-R-Part-II/OS-M3-S3-R-Part-II-slides.pptx
+++ b/materials/OS-M3/OS-M3-S3-R-Part-II/OS-M3-S3-R-Part-II-slides.pptx
@@ -4025,7 +4025,7 @@
             </a:pPr>
             <a:r>
               <a:rPr/>
-              <a:t>08/02/2026</a:t>
+              <a:t>11/02/2026</a:t>
             </a:r>
           </a:p>
         </p:txBody>

--- a/materials/OS-M3/OS-M3-S3-R-Part-II/OS-M3-S3-R-Part-II-slides.pptx
+++ b/materials/OS-M3/OS-M3-S3-R-Part-II/OS-M3-S3-R-Part-II-slides.pptx
@@ -4025,7 +4025,7 @@
             </a:pPr>
             <a:r>
               <a:rPr/>
-              <a:t>11/02/2026</a:t>
+              <a:t>12/02/2026</a:t>
             </a:r>
           </a:p>
         </p:txBody>

--- a/materials/OS-M3/OS-M3-S3-R-Part-II/OS-M3-S3-R-Part-II-slides.pptx
+++ b/materials/OS-M3/OS-M3-S3-R-Part-II/OS-M3-S3-R-Part-II-slides.pptx
@@ -4025,7 +4025,7 @@
             </a:pPr>
             <a:r>
               <a:rPr/>
-              <a:t>12/02/2026</a:t>
+              <a:t>13/02/2026</a:t>
             </a:r>
           </a:p>
         </p:txBody>

--- a/materials/OS-M3/OS-M3-S3-R-Part-II/OS-M3-S3-R-Part-II-slides.pptx
+++ b/materials/OS-M3/OS-M3-S3-R-Part-II/OS-M3-S3-R-Part-II-slides.pptx
@@ -4025,7 +4025,7 @@
             </a:pPr>
             <a:r>
               <a:rPr/>
-              <a:t>13/02/2026</a:t>
+              <a:t>15/02/2026</a:t>
             </a:r>
           </a:p>
         </p:txBody>

--- a/materials/OS-M3/OS-M3-S3-R-Part-II/OS-M3-S3-R-Part-II-slides.pptx
+++ b/materials/OS-M3/OS-M3-S3-R-Part-II/OS-M3-S3-R-Part-II-slides.pptx
@@ -4025,7 +4025,7 @@
             </a:pPr>
             <a:r>
               <a:rPr/>
-              <a:t>15/02/2026</a:t>
+              <a:t>18/02/2026</a:t>
             </a:r>
           </a:p>
         </p:txBody>

--- a/materials/OS-M3/OS-M3-S3-R-Part-II/OS-M3-S3-R-Part-II-slides.pptx
+++ b/materials/OS-M3/OS-M3-S3-R-Part-II/OS-M3-S3-R-Part-II-slides.pptx
@@ -4025,7 +4025,7 @@
             </a:pPr>
             <a:r>
               <a:rPr/>
-              <a:t>18/02/2026</a:t>
+              <a:t>22/02/2026</a:t>
             </a:r>
           </a:p>
         </p:txBody>

--- a/materials/OS-M3/OS-M3-S3-R-Part-II/OS-M3-S3-R-Part-II-slides.pptx
+++ b/materials/OS-M3/OS-M3-S3-R-Part-II/OS-M3-S3-R-Part-II-slides.pptx
@@ -4025,7 +4025,7 @@
             </a:pPr>
             <a:r>
               <a:rPr/>
-              <a:t>22/02/2026</a:t>
+              <a:t>01/03/2026</a:t>
             </a:r>
           </a:p>
         </p:txBody>

--- a/materials/OS-M3/OS-M3-S3-R-Part-II/OS-M3-S3-R-Part-II-slides.pptx
+++ b/materials/OS-M3/OS-M3-S3-R-Part-II/OS-M3-S3-R-Part-II-slides.pptx
@@ -4025,7 +4025,7 @@
             </a:pPr>
             <a:r>
               <a:rPr/>
-              <a:t>01/03/2026</a:t>
+              <a:t>04/03/2026</a:t>
             </a:r>
           </a:p>
         </p:txBody>

--- a/materials/OS-M3/OS-M3-S3-R-Part-II/OS-M3-S3-R-Part-II-slides.pptx
+++ b/materials/OS-M3/OS-M3-S3-R-Part-II/OS-M3-S3-R-Part-II-slides.pptx
@@ -4025,7 +4025,7 @@
             </a:pPr>
             <a:r>
               <a:rPr/>
-              <a:t>04/03/2026</a:t>
+              <a:t>05/03/2026</a:t>
             </a:r>
           </a:p>
         </p:txBody>

--- a/materials/OS-M3/OS-M3-S3-R-Part-II/OS-M3-S3-R-Part-II-slides.pptx
+++ b/materials/OS-M3/OS-M3-S3-R-Part-II/OS-M3-S3-R-Part-II-slides.pptx
@@ -4025,7 +4025,7 @@
             </a:pPr>
             <a:r>
               <a:rPr/>
-              <a:t>05/03/2026</a:t>
+              <a:t>08/03/2026</a:t>
             </a:r>
           </a:p>
         </p:txBody>

--- a/materials/OS-M3/OS-M3-S3-R-Part-II/OS-M3-S3-R-Part-II-slides.pptx
+++ b/materials/OS-M3/OS-M3-S3-R-Part-II/OS-M3-S3-R-Part-II-slides.pptx
@@ -4025,7 +4025,7 @@
             </a:pPr>
             <a:r>
               <a:rPr/>
-              <a:t>08/03/2026</a:t>
+              <a:t>11/03/2026</a:t>
             </a:r>
           </a:p>
         </p:txBody>

--- a/materials/OS-M3/OS-M3-S3-R-Part-II/OS-M3-S3-R-Part-II-slides.pptx
+++ b/materials/OS-M3/OS-M3-S3-R-Part-II/OS-M3-S3-R-Part-II-slides.pptx
@@ -4025,7 +4025,7 @@
             </a:pPr>
             <a:r>
               <a:rPr/>
-              <a:t>11/03/2026</a:t>
+              <a:t>12/03/2026</a:t>
             </a:r>
           </a:p>
         </p:txBody>

--- a/materials/OS-M3/OS-M3-S3-R-Part-II/OS-M3-S3-R-Part-II-slides.pptx
+++ b/materials/OS-M3/OS-M3-S3-R-Part-II/OS-M3-S3-R-Part-II-slides.pptx
@@ -4025,7 +4025,7 @@
             </a:pPr>
             <a:r>
               <a:rPr/>
-              <a:t>12/03/2026</a:t>
+              <a:t>15/03/2026</a:t>
             </a:r>
           </a:p>
         </p:txBody>

--- a/materials/OS-M3/OS-M3-S3-R-Part-II/OS-M3-S3-R-Part-II-slides.pptx
+++ b/materials/OS-M3/OS-M3-S3-R-Part-II/OS-M3-S3-R-Part-II-slides.pptx
@@ -4025,7 +4025,7 @@
             </a:pPr>
             <a:r>
               <a:rPr/>
-              <a:t>15/03/2026</a:t>
+              <a:t>19/03/2026</a:t>
             </a:r>
           </a:p>
         </p:txBody>

--- a/materials/OS-M3/OS-M3-S3-R-Part-II/OS-M3-S3-R-Part-II-slides.pptx
+++ b/materials/OS-M3/OS-M3-S3-R-Part-II/OS-M3-S3-R-Part-II-slides.pptx
@@ -3996,8 +3996,6 @@
             <a:pPr lvl="0" indent="0" marL="0">
               <a:buNone/>
             </a:pPr>
-            <a:br/>
-            <a:br/>
             <a:r>
               <a:rPr/>
               <a:t>Luz Sachez Steinhagen</a:t>
@@ -4025,7 +4023,7 @@
             </a:pPr>
             <a:r>
               <a:rPr/>
-              <a:t>19/03/2026</a:t>
+              <a:t>22/03/2026</a:t>
             </a:r>
           </a:p>
         </p:txBody>

--- a/materials/OS-M3/OS-M3-S3-R-Part-II/OS-M3-S3-R-Part-II-slides.pptx
+++ b/materials/OS-M3/OS-M3-S3-R-Part-II/OS-M3-S3-R-Part-II-slides.pptx
@@ -4023,7 +4023,7 @@
             </a:pPr>
             <a:r>
               <a:rPr/>
-              <a:t>22/03/2026</a:t>
+              <a:t>29/03/2026</a:t>
             </a:r>
           </a:p>
         </p:txBody>

--- a/materials/OS-M3/OS-M3-S3-R-Part-II/OS-M3-S3-R-Part-II-slides.pptx
+++ b/materials/OS-M3/OS-M3-S3-R-Part-II/OS-M3-S3-R-Part-II-slides.pptx
@@ -4023,7 +4023,7 @@
             </a:pPr>
             <a:r>
               <a:rPr/>
-              <a:t>29/03/2026</a:t>
+              <a:t>01/04/2026</a:t>
             </a:r>
           </a:p>
         </p:txBody>

--- a/materials/OS-M3/OS-M3-S3-R-Part-II/OS-M3-S3-R-Part-II-slides.pptx
+++ b/materials/OS-M3/OS-M3-S3-R-Part-II/OS-M3-S3-R-Part-II-slides.pptx
@@ -4023,7 +4023,7 @@
             </a:pPr>
             <a:r>
               <a:rPr/>
-              <a:t>01/04/2026</a:t>
+              <a:t>05/04/2026</a:t>
             </a:r>
           </a:p>
         </p:txBody>

--- a/materials/OS-M3/OS-M3-S3-R-Part-II/OS-M3-S3-R-Part-II-slides.pptx
+++ b/materials/OS-M3/OS-M3-S3-R-Part-II/OS-M3-S3-R-Part-II-slides.pptx
@@ -4023,7 +4023,7 @@
             </a:pPr>
             <a:r>
               <a:rPr/>
-              <a:t>05/04/2026</a:t>
+              <a:t>08/04/2026</a:t>
             </a:r>
           </a:p>
         </p:txBody>

--- a/materials/OS-M3/OS-M3-S3-R-Part-II/OS-M3-S3-R-Part-II-slides.pptx
+++ b/materials/OS-M3/OS-M3-S3-R-Part-II/OS-M3-S3-R-Part-II-slides.pptx
@@ -4023,7 +4023,7 @@
             </a:pPr>
             <a:r>
               <a:rPr/>
-              <a:t>08/04/2026</a:t>
+              <a:t>10/04/2026</a:t>
             </a:r>
           </a:p>
         </p:txBody>

--- a/materials/OS-M3/OS-M3-S3-R-Part-II/OS-M3-S3-R-Part-II-slides.pptx
+++ b/materials/OS-M3/OS-M3-S3-R-Part-II/OS-M3-S3-R-Part-II-slides.pptx
@@ -4023,7 +4023,7 @@
             </a:pPr>
             <a:r>
               <a:rPr/>
-              <a:t>10/04/2026</a:t>
+              <a:t>12/04/2026</a:t>
             </a:r>
           </a:p>
         </p:txBody>

--- a/materials/OS-M3/OS-M3-S3-R-Part-II/OS-M3-S3-R-Part-II-slides.pptx
+++ b/materials/OS-M3/OS-M3-S3-R-Part-II/OS-M3-S3-R-Part-II-slides.pptx
@@ -4023,7 +4023,7 @@
             </a:pPr>
             <a:r>
               <a:rPr/>
-              <a:t>12/04/2026</a:t>
+              <a:t>15/04/2026</a:t>
             </a:r>
           </a:p>
         </p:txBody>

--- a/materials/OS-M3/OS-M3-S3-R-Part-II/OS-M3-S3-R-Part-II-slides.pptx
+++ b/materials/OS-M3/OS-M3-S3-R-Part-II/OS-M3-S3-R-Part-II-slides.pptx
@@ -4023,7 +4023,7 @@
             </a:pPr>
             <a:r>
               <a:rPr/>
-              <a:t>15/04/2026</a:t>
+              <a:t>19/04/2026</a:t>
             </a:r>
           </a:p>
         </p:txBody>

--- a/materials/OS-M3/OS-M3-S3-R-Part-II/OS-M3-S3-R-Part-II-slides.pptx
+++ b/materials/OS-M3/OS-M3-S3-R-Part-II/OS-M3-S3-R-Part-II-slides.pptx
@@ -4023,7 +4023,7 @@
             </a:pPr>
             <a:r>
               <a:rPr/>
-              <a:t>19/04/2026</a:t>
+              <a:t>26/04/2026</a:t>
             </a:r>
           </a:p>
         </p:txBody>

--- a/materials/OS-M3/OS-M3-S3-R-Part-II/OS-M3-S3-R-Part-II-slides.pptx
+++ b/materials/OS-M3/OS-M3-S3-R-Part-II/OS-M3-S3-R-Part-II-slides.pptx
@@ -4023,7 +4023,7 @@
             </a:pPr>
             <a:r>
               <a:rPr/>
-              <a:t>26/04/2026</a:t>
+              <a:t>29/04/2026</a:t>
             </a:r>
           </a:p>
         </p:txBody>

--- a/materials/OS-M3/OS-M3-S3-R-Part-II/OS-M3-S3-R-Part-II-slides.pptx
+++ b/materials/OS-M3/OS-M3-S3-R-Part-II/OS-M3-S3-R-Part-II-slides.pptx
@@ -4023,7 +4023,7 @@
             </a:pPr>
             <a:r>
               <a:rPr/>
-              <a:t>29/04/2026</a:t>
+              <a:t>03/05/2026</a:t>
             </a:r>
           </a:p>
         </p:txBody>

--- a/materials/OS-M3/OS-M3-S3-R-Part-II/OS-M3-S3-R-Part-II-slides.pptx
+++ b/materials/OS-M3/OS-M3-S3-R-Part-II/OS-M3-S3-R-Part-II-slides.pptx
@@ -4023,7 +4023,7 @@
             </a:pPr>
             <a:r>
               <a:rPr/>
-              <a:t>03/05/2026</a:t>
+              <a:t>06/05/2026</a:t>
             </a:r>
           </a:p>
         </p:txBody>

--- a/materials/OS-M3/OS-M3-S3-R-Part-II/OS-M3-S3-R-Part-II-slides.pptx
+++ b/materials/OS-M3/OS-M3-S3-R-Part-II/OS-M3-S3-R-Part-II-slides.pptx
@@ -4023,7 +4023,7 @@
             </a:pPr>
             <a:r>
               <a:rPr/>
-              <a:t>06/05/2026</a:t>
+              <a:t>12/05/2026</a:t>
             </a:r>
           </a:p>
         </p:txBody>

--- a/materials/OS-M3/OS-M3-S3-R-Part-II/OS-M3-S3-R-Part-II-slides.pptx
+++ b/materials/OS-M3/OS-M3-S3-R-Part-II/OS-M3-S3-R-Part-II-slides.pptx
@@ -4023,7 +4023,7 @@
             </a:pPr>
             <a:r>
               <a:rPr/>
-              <a:t>12/05/2026</a:t>
+              <a:t>17/05/2026</a:t>
             </a:r>
           </a:p>
         </p:txBody>

--- a/materials/OS-M3/OS-M3-S3-R-Part-II/OS-M3-S3-R-Part-II-slides.pptx
+++ b/materials/OS-M3/OS-M3-S3-R-Part-II/OS-M3-S3-R-Part-II-slides.pptx
@@ -4023,7 +4023,7 @@
             </a:pPr>
             <a:r>
               <a:rPr/>
-              <a:t>17/05/2026</a:t>
+              <a:t>20/05/2026</a:t>
             </a:r>
           </a:p>
         </p:txBody>

--- a/materials/OS-M3/OS-M3-S3-R-Part-II/OS-M3-S3-R-Part-II-slides.pptx
+++ b/materials/OS-M3/OS-M3-S3-R-Part-II/OS-M3-S3-R-Part-II-slides.pptx
@@ -4023,7 +4023,7 @@
             </a:pPr>
             <a:r>
               <a:rPr/>
-              <a:t>20/05/2026</a:t>
+              <a:t>25/05/2026</a:t>
             </a:r>
           </a:p>
         </p:txBody>

--- a/materials/OS-M3/OS-M3-S3-R-Part-II/OS-M3-S3-R-Part-II-slides.pptx
+++ b/materials/OS-M3/OS-M3-S3-R-Part-II/OS-M3-S3-R-Part-II-slides.pptx
@@ -4023,7 +4023,7 @@
             </a:pPr>
             <a:r>
               <a:rPr/>
-              <a:t>25/05/2026</a:t>
+              <a:t>01/06/2026</a:t>
             </a:r>
           </a:p>
         </p:txBody>

--- a/materials/OS-M3/OS-M3-S3-R-Part-II/OS-M3-S3-R-Part-II-slides.pptx
+++ b/materials/OS-M3/OS-M3-S3-R-Part-II/OS-M3-S3-R-Part-II-slides.pptx
@@ -4023,7 +4023,7 @@
             </a:pPr>
             <a:r>
               <a:rPr/>
-              <a:t>01/06/2026</a:t>
+              <a:t>08/06/2026</a:t>
             </a:r>
           </a:p>
         </p:txBody>

--- a/materials/OS-M3/OS-M3-S3-R-Part-II/OS-M3-S3-R-Part-II-slides.pptx
+++ b/materials/OS-M3/OS-M3-S3-R-Part-II/OS-M3-S3-R-Part-II-slides.pptx
@@ -4023,7 +4023,7 @@
             </a:pPr>
             <a:r>
               <a:rPr/>
-              <a:t>08/06/2026</a:t>
+              <a:t>09/06/2026</a:t>
             </a:r>
           </a:p>
         </p:txBody>

--- a/materials/OS-M3/OS-M3-S3-R-Part-II/OS-M3-S3-R-Part-II-slides.pptx
+++ b/materials/OS-M3/OS-M3-S3-R-Part-II/OS-M3-S3-R-Part-II-slides.pptx
@@ -4023,7 +4023,7 @@
             </a:pPr>
             <a:r>
               <a:rPr/>
-              <a:t>09/06/2026</a:t>
+              <a:t>15/06/2026</a:t>
             </a:r>
           </a:p>
         </p:txBody>

--- a/materials/OS-M3/OS-M3-S3-R-Part-II/OS-M3-S3-R-Part-II-slides.pptx
+++ b/materials/OS-M3/OS-M3-S3-R-Part-II/OS-M3-S3-R-Part-II-slides.pptx
@@ -4023,7 +4023,7 @@
             </a:pPr>
             <a:r>
               <a:rPr/>
-              <a:t>15/06/2026</a:t>
+              <a:t>22/06/2026</a:t>
             </a:r>
           </a:p>
         </p:txBody>

--- a/materials/OS-M3/OS-M3-S3-R-Part-II/OS-M3-S3-R-Part-II-slides.pptx
+++ b/materials/OS-M3/OS-M3-S3-R-Part-II/OS-M3-S3-R-Part-II-slides.pptx
@@ -4023,7 +4023,7 @@
             </a:pPr>
             <a:r>
               <a:rPr/>
-              <a:t>22/06/2026</a:t>
+              <a:t>29/06/2026</a:t>
             </a:r>
           </a:p>
         </p:txBody>

--- a/materials/OS-M3/OS-M3-S3-R-Part-II/OS-M3-S3-R-Part-II-slides.pptx
+++ b/materials/OS-M3/OS-M3-S3-R-Part-II/OS-M3-S3-R-Part-II-slides.pptx
@@ -4023,7 +4023,7 @@
             </a:pPr>
             <a:r>
               <a:rPr/>
-              <a:t>29/06/2026</a:t>
+              <a:t>06/07/2026</a:t>
             </a:r>
           </a:p>
         </p:txBody>

--- a/materials/OS-M3/OS-M3-S3-R-Part-II/OS-M3-S3-R-Part-II-slides.pptx
+++ b/materials/OS-M3/OS-M3-S3-R-Part-II/OS-M3-S3-R-Part-II-slides.pptx
@@ -4023,7 +4023,7 @@
             </a:pPr>
             <a:r>
               <a:rPr/>
-              <a:t>06/07/2026</a:t>
+              <a:t>12/07/2026</a:t>
             </a:r>
           </a:p>
         </p:txBody>

--- a/materials/OS-M3/OS-M3-S3-R-Part-II/OS-M3-S3-R-Part-II-slides.pptx
+++ b/materials/OS-M3/OS-M3-S3-R-Part-II/OS-M3-S3-R-Part-II-slides.pptx
@@ -4023,7 +4023,7 @@
             </a:pPr>
             <a:r>
               <a:rPr/>
-              <a:t>12/07/2026</a:t>
+              <a:t>17/07/2026</a:t>
             </a:r>
           </a:p>
         </p:txBody>

--- a/materials/OS-M3/OS-M3-S3-R-Part-II/OS-M3-S3-R-Part-II-slides.pptx
+++ b/materials/OS-M3/OS-M3-S3-R-Part-II/OS-M3-S3-R-Part-II-slides.pptx
@@ -4023,7 +4023,7 @@
             </a:pPr>
             <a:r>
               <a:rPr/>
-              <a:t>17/07/2026</a:t>
+              <a:t>20/07/2026</a:t>
             </a:r>
           </a:p>
         </p:txBody>

--- a/materials/OS-M3/OS-M3-S3-R-Part-II/OS-M3-S3-R-Part-II-slides.pptx
+++ b/materials/OS-M3/OS-M3-S3-R-Part-II/OS-M3-S3-R-Part-II-slides.pptx
@@ -4023,7 +4023,7 @@
             </a:pPr>
             <a:r>
               <a:rPr/>
-              <a:t>20/07/2026</a:t>
+              <a:t>22/07/2026</a:t>
             </a:r>
           </a:p>
         </p:txBody>

--- a/materials/OS-M3/OS-M3-S3-R-Part-II/OS-M3-S3-R-Part-II-slides.pptx
+++ b/materials/OS-M3/OS-M3-S3-R-Part-II/OS-M3-S3-R-Part-II-slides.pptx
@@ -4023,7 +4023,7 @@
             </a:pPr>
             <a:r>
               <a:rPr/>
-              <a:t>22/07/2026</a:t>
+              <a:t>23/07/2026</a:t>
             </a:r>
           </a:p>
         </p:txBody>

--- a/materials/OS-M3/OS-M3-S3-R-Part-II/OS-M3-S3-R-Part-II-slides.pptx
+++ b/materials/OS-M3/OS-M3-S3-R-Part-II/OS-M3-S3-R-Part-II-slides.pptx
@@ -4023,7 +4023,7 @@
             </a:pPr>
             <a:r>
               <a:rPr/>
-              <a:t>23/07/2026</a:t>
+              <a:t>27/07/2026</a:t>
             </a:r>
           </a:p>
         </p:txBody>

--- a/materials/OS-M3/OS-M3-S3-R-Part-II/OS-M3-S3-R-Part-II-slides.pptx
+++ b/materials/OS-M3/OS-M3-S3-R-Part-II/OS-M3-S3-R-Part-II-slides.pptx
@@ -4023,7 +4023,7 @@
             </a:pPr>
             <a:r>
               <a:rPr/>
-              <a:t>27/07/2026</a:t>
+              <a:t>03/08/2026</a:t>
             </a:r>
           </a:p>
         </p:txBody>

--- a/materials/OS-M3/OS-M3-S3-R-Part-II/OS-M3-S3-R-Part-II-slides.pptx
+++ b/materials/OS-M3/OS-M3-S3-R-Part-II/OS-M3-S3-R-Part-II-slides.pptx
@@ -4023,7 +4023,7 @@
             </a:pPr>
             <a:r>
               <a:rPr/>
-              <a:t>03/08/2026</a:t>
+              <a:t>04/08/2026</a:t>
             </a:r>
           </a:p>
         </p:txBody>
